--- a/docs/iris_slide.pptx
+++ b/docs/iris_slide.pptx
@@ -4205,7 +4205,7 @@
                 </a:solidFill>
                 <a:latin typeface="Calibri"/>
               </a:rPr>
-              <a:t>0.938</a:t>
+              <a:t>0.923</a:t>
             </a:r>
           </a:p>
         </p:txBody>
@@ -4240,7 +4240,7 @@
                 </a:solidFill>
                 <a:latin typeface="Calibri"/>
               </a:rPr>
-              <a:t>0.912</a:t>
+              <a:t>0.916</a:t>
             </a:r>
           </a:p>
         </p:txBody>
@@ -4275,7 +4275,7 @@
                 </a:solidFill>
                 <a:latin typeface="Calibri"/>
               </a:rPr>
-              <a:t>0.925</a:t>
+              <a:t>0.920</a:t>
             </a:r>
           </a:p>
         </p:txBody>
@@ -4389,7 +4389,7 @@
                 </a:solidFill>
                 <a:latin typeface="Calibri"/>
               </a:rPr>
-              <a:t>0.920</a:t>
+              <a:t>0.922</a:t>
             </a:r>
           </a:p>
         </p:txBody>
@@ -4424,7 +4424,7 @@
                 </a:solidFill>
                 <a:latin typeface="Calibri"/>
               </a:rPr>
-              <a:t>0.964</a:t>
+              <a:t>0.948</a:t>
             </a:r>
           </a:p>
         </p:txBody>
@@ -4459,7 +4459,7 @@
                 </a:solidFill>
                 <a:latin typeface="Calibri"/>
               </a:rPr>
-              <a:t>0.941</a:t>
+              <a:t>0.935</a:t>
             </a:r>
           </a:p>
         </p:txBody>
@@ -4745,7 +4745,7 @@
         <p:spPr>
           <a:xfrm>
             <a:off x="2011679" y="3941064"/>
-            <a:ext cx="2706624" cy="237744"/>
+            <a:ext cx="2691993" cy="237744"/>
           </a:xfrm>
           <a:prstGeom prst="rect">
             <a:avLst/>
@@ -4845,7 +4845,7 @@
                 </a:solidFill>
                 <a:latin typeface="Calibri"/>
               </a:rPr>
-              <a:t>0.925</a:t>
+              <a:t>0.920</a:t>
             </a:r>
           </a:p>
         </p:txBody>
@@ -4903,7 +4903,7 @@
         <p:spPr>
           <a:xfrm>
             <a:off x="2011679" y="4270248"/>
-            <a:ext cx="2753441" cy="237744"/>
+            <a:ext cx="2735884" cy="237744"/>
           </a:xfrm>
           <a:prstGeom prst="rect">
             <a:avLst/>
@@ -5003,7 +5003,7 @@
                 </a:solidFill>
                 <a:latin typeface="Calibri"/>
               </a:rPr>
-              <a:t>0.941</a:t>
+              <a:t>0.935</a:t>
             </a:r>
           </a:p>
         </p:txBody>
@@ -5117,7 +5117,7 @@
                 </a:solidFill>
                 <a:latin typeface="Cambria"/>
               </a:rPr>
-              <a:t>95.07 %</a:t>
+              <a:t>94.67 %</a:t>
             </a:r>
           </a:p>
         </p:txBody>
@@ -5152,7 +5152,7 @@
                 </a:solidFill>
                 <a:latin typeface="Calibri"/>
               </a:rPr>
-              <a:t>± 5.63 %  (50 folds)</a:t>
+              <a:t>± 6.39 %  (50 folds)</a:t>
             </a:r>
           </a:p>
         </p:txBody>
@@ -5187,7 +5187,7 @@
                 </a:solidFill>
                 <a:latin typeface="Calibri"/>
               </a:rPr>
-              <a:t>min 80 %   ·   max 100 %</a:t>
+              <a:t>min 73 %   ·   max 100 %</a:t>
             </a:r>
           </a:p>
         </p:txBody>
@@ -5345,7 +5345,7 @@
                 </a:solidFill>
                 <a:latin typeface="Calibri"/>
               </a:rPr>
-              <a:t>sepal-width 33 %  ·  sepal-length 33 %  ·  petal-width 22 %  ·  petal-length 11 %</a:t>
+              <a:t>sepal-length 37 %  ·  petal-length 25 %  ·  sepal-width 25 %  ·  petal-width 12 %</a:t>
             </a:r>
           </a:p>
         </p:txBody>
